--- a/test/fixtures/sample-revised.pptx
+++ b/test/fixtures/sample-revised.pptx
@@ -1231,7 +1231,8 @@
           <a:p>
             <a:r>
               <a:rPr lang="en-US" dirty="0"/>
-              <a:t/>
+              <a:t>Mention the support backlog numbers and the new portal.
+Keep this under two minutes.</a:t>
             </a:r>
             <a:endParaRPr lang="en-US" dirty="0"/>
           </a:p>
